--- a/screen/화면설계서_독수리5형제.pptx
+++ b/screen/화면설계서_독수리5형제.pptx
@@ -11249,7 +11249,7 @@
                 </a:solidFill>
                 <a:latin typeface="맑은 고딕"/>
               </a:rPr>
-              <a:t>상단 메뉴 / 로그인 클릭</a:t>
+              <a:t>메인 화면 / 상단 로그인 클릭</a:t>
             </a:r>
           </a:p>
         </p:txBody>
@@ -11410,7 +11410,7 @@
         </p:nvSpPr>
         <p:spPr>
           <a:xfrm>
-            <a:off x="5027142" y="1661922"/>
+            <a:off x="5027142" y="1924812"/>
             <a:ext cx="201168" cy="201168"/>
           </a:xfrm>
           <a:prstGeom prst="ellipse">
@@ -11463,7 +11463,7 @@
         </p:nvSpPr>
         <p:spPr>
           <a:xfrm>
-            <a:off x="5027142" y="2439162"/>
+            <a:off x="5027142" y="2221991"/>
             <a:ext cx="201168" cy="201168"/>
           </a:xfrm>
           <a:prstGeom prst="ellipse">
@@ -11516,7 +11516,7 @@
         </p:nvSpPr>
         <p:spPr>
           <a:xfrm>
-            <a:off x="5027142" y="2896362"/>
+            <a:off x="5027142" y="2679192"/>
             <a:ext cx="201168" cy="201168"/>
           </a:xfrm>
           <a:prstGeom prst="ellipse">
@@ -11569,7 +11569,7 @@
         </p:nvSpPr>
         <p:spPr>
           <a:xfrm>
-            <a:off x="5027142" y="3364992"/>
+            <a:off x="5027142" y="3159252"/>
             <a:ext cx="201168" cy="201168"/>
           </a:xfrm>
           <a:prstGeom prst="ellipse">
@@ -11622,7 +11622,7 @@
         </p:nvSpPr>
         <p:spPr>
           <a:xfrm>
-            <a:off x="5027142" y="3696462"/>
+            <a:off x="5027142" y="3536442"/>
             <a:ext cx="201168" cy="201168"/>
           </a:xfrm>
           <a:prstGeom prst="ellipse">
@@ -11849,22 +11849,6 @@
                 <a:latin typeface="맑은 고딕"/>
               </a:rPr>
               <a:t>- 5번 : 개인정보 안내 (비밀번호는 되돌릴 수 없게 암호화해 저장)</a:t>
-            </a:r>
-          </a:p>
-          <a:p>
-            <a:pPr algn="l">
-              <a:lnSpc>
-                <a:spcPct val="105000"/>
-              </a:lnSpc>
-            </a:pPr>
-            <a:r>
-              <a:rPr sz="1000" b="0">
-                <a:solidFill>
-                  <a:srgbClr val="111111"/>
-                </a:solidFill>
-                <a:latin typeface="맑은 고딕"/>
-              </a:rPr>
-              <a:t>※ 개선 필요 : 로그인 탭에서도 '이름' 칸이 보임 / 휴대폰 화면에서 상단 로그인 메뉴가 숨겨짐</a:t>
             </a:r>
           </a:p>
         </p:txBody>
@@ -13485,6 +13469,15 @@
                     <a:lstStyle/>
                     <a:p>
                       <a:pPr algn="ctr"/>
+                      <a:r>
+                        <a:rPr sz="1100" b="0">
+                          <a:solidFill>
+                            <a:srgbClr val="111111"/>
+                          </a:solidFill>
+                          <a:latin typeface="맑은 고딕"/>
+                        </a:rPr>
+                        <a:t>0.4</a:t>
+                      </a:r>
                     </a:p>
                   </a:txBody>
                   <a:tcPr anchor="ctr" marL="54864" marR="54864">
@@ -13499,6 +13492,15 @@
                     <a:lstStyle/>
                     <a:p>
                       <a:pPr algn="ctr"/>
+                      <a:r>
+                        <a:rPr sz="1100" b="0">
+                          <a:solidFill>
+                            <a:srgbClr val="111111"/>
+                          </a:solidFill>
+                          <a:latin typeface="맑은 고딕"/>
+                        </a:rPr>
+                        <a:t>2026.09.28</a:t>
+                      </a:r>
                     </a:p>
                   </a:txBody>
                   <a:tcPr anchor="ctr" marL="54864" marR="54864">
@@ -13513,6 +13515,15 @@
                     <a:lstStyle/>
                     <a:p>
                       <a:pPr algn="l"/>
+                      <a:r>
+                        <a:rPr sz="1100" b="0">
+                          <a:solidFill>
+                            <a:srgbClr val="111111"/>
+                          </a:solidFill>
+                          <a:latin typeface="맑은 고딕"/>
+                        </a:rPr>
+                        <a:t>- 로그인 화면 수정 (이름 칸 숨김, 휴대폰 상단 로그인 메뉴 추가)</a:t>
+                      </a:r>
                     </a:p>
                   </a:txBody>
                   <a:tcPr anchor="ctr" marL="54864" marR="54864">
@@ -13527,6 +13538,15 @@
                     <a:lstStyle/>
                     <a:p>
                       <a:pPr algn="ctr"/>
+                      <a:r>
+                        <a:rPr sz="1100" b="0">
+                          <a:solidFill>
+                            <a:srgbClr val="111111"/>
+                          </a:solidFill>
+                          <a:latin typeface="맑은 고딕"/>
+                        </a:rPr>
+                        <a:t>이영훈</a:t>
+                      </a:r>
                     </a:p>
                   </a:txBody>
                   <a:tcPr anchor="ctr" marL="54864" marR="54864">
@@ -19774,7 +19794,60 @@
       </p:sp>
       <p:sp>
         <p:nvSpPr>
-          <p:cNvPr id="21" name="Rectangle 20"/>
+          <p:cNvPr id="21" name="Oval 20"/>
+          <p:cNvSpPr/>
+          <p:nvPr/>
+        </p:nvSpPr>
+        <p:spPr>
+          <a:xfrm>
+            <a:off x="5987262" y="313182"/>
+            <a:ext cx="201168" cy="201168"/>
+          </a:xfrm>
+          <a:prstGeom prst="ellipse">
+            <a:avLst/>
+          </a:prstGeom>
+          <a:solidFill>
+            <a:srgbClr val="E01B1B"/>
+          </a:solidFill>
+          <a:ln>
+            <a:noFill/>
+          </a:ln>
+          <a:effectLst/>
+        </p:spPr>
+        <p:style>
+          <a:lnRef idx="1">
+            <a:schemeClr val="accent1"/>
+          </a:lnRef>
+          <a:fillRef idx="3">
+            <a:schemeClr val="accent1"/>
+          </a:fillRef>
+          <a:effectRef idx="2">
+            <a:schemeClr val="accent1"/>
+          </a:effectRef>
+          <a:fontRef idx="minor">
+            <a:schemeClr val="lt1"/>
+          </a:fontRef>
+        </p:style>
+        <p:txBody>
+          <a:bodyPr rtlCol="0" anchor="ctr" wrap="square" lIns="27432" rIns="27432" tIns="9144" bIns="9144"/>
+          <a:lstStyle/>
+          <a:p>
+            <a:pPr algn="ctr"/>
+            <a:r>
+              <a:rPr sz="900" b="1">
+                <a:solidFill>
+                  <a:srgbClr val="FFFFFF"/>
+                </a:solidFill>
+                <a:latin typeface="맑은 고딕"/>
+              </a:rPr>
+              <a:t>5</a:t>
+            </a:r>
+          </a:p>
+        </p:txBody>
+      </p:sp>
+      <p:sp>
+        <p:nvSpPr>
+          <p:cNvPr id="22" name="Rectangle 21"/>
           <p:cNvSpPr/>
           <p:nvPr/>
         </p:nvSpPr>
@@ -19818,7 +19891,7 @@
       </p:sp>
       <p:sp>
         <p:nvSpPr>
-          <p:cNvPr id="22" name="TextBox 21"/>
+          <p:cNvPr id="23" name="TextBox 22"/>
           <p:cNvSpPr txBox="1"/>
           <p:nvPr/>
         </p:nvSpPr>
@@ -19857,7 +19930,7 @@
       </p:sp>
       <p:sp>
         <p:nvSpPr>
-          <p:cNvPr id="23" name="TextBox 22"/>
+          <p:cNvPr id="24" name="TextBox 23"/>
           <p:cNvSpPr txBox="1"/>
           <p:nvPr/>
         </p:nvSpPr>
@@ -19938,6 +20011,22 @@
                 <a:latin typeface="맑은 고딕"/>
               </a:rPr>
               <a:t>- 4번 : AI 병원 안내를 여는 음성 버튼 (모든 화면 오른쪽 아래에 고정)</a:t>
+            </a:r>
+          </a:p>
+          <a:p>
+            <a:pPr algn="l">
+              <a:lnSpc>
+                <a:spcPct val="105000"/>
+              </a:lnSpc>
+            </a:pPr>
+            <a:r>
+              <a:rPr sz="1000" b="0">
+                <a:solidFill>
+                  <a:srgbClr val="111111"/>
+                </a:solidFill>
+                <a:latin typeface="맑은 고딕"/>
+              </a:rPr>
+              <a:t>- 5번 : 로그인 (로그인하면 '예약 내역' 메뉴가 생김)</a:t>
             </a:r>
           </a:p>
         </p:txBody>

--- a/screen/화면설계서_독수리5형제.pptx
+++ b/screen/화면설계서_독수리5형제.pptx
@@ -3594,7 +3594,7 @@
                 </a:solidFill>
                 <a:latin typeface="맑은 고딕"/>
               </a:rPr>
-              <a:t>병원 추천 결과</a:t>
+              <a:t>병원 추천 결과 [핵심]</a:t>
             </a:r>
           </a:p>
         </p:txBody>
@@ -4714,7 +4714,7 @@
                 </a:solidFill>
                 <a:latin typeface="맑은 고딕"/>
               </a:rPr>
-              <a:t>병원 상세 정보</a:t>
+              <a:t>병원 상세 정보 [핵심]</a:t>
             </a:r>
           </a:p>
         </p:txBody>
@@ -5696,7 +5696,7 @@
                 </a:solidFill>
                 <a:latin typeface="맑은 고딕"/>
               </a:rPr>
-              <a:t>예약 안내</a:t>
+              <a:t>예약 안내 [후순위]</a:t>
             </a:r>
           </a:p>
         </p:txBody>
@@ -6599,6 +6599,22 @@
                 <a:latin typeface="맑은 고딕"/>
               </a:rPr>
               <a:t>- 6번 : '이 화면에서 예약이 접수되지는 않습니다' 안내 (오해 방지)</a:t>
+            </a:r>
+          </a:p>
+          <a:p>
+            <a:pPr algn="l">
+              <a:lnSpc>
+                <a:spcPct val="105000"/>
+              </a:lnSpc>
+            </a:pPr>
+            <a:r>
+              <a:rPr sz="1000" b="0">
+                <a:solidFill>
+                  <a:srgbClr val="111111"/>
+                </a:solidFill>
+                <a:latin typeface="맑은 고딕"/>
+              </a:rPr>
+              <a:t>※ 후순위 : 예약 페이지를 굿닥 병원 상세 화면으로 바로 연결하는 개선 예정</a:t>
             </a:r>
           </a:p>
         </p:txBody>
@@ -6816,7 +6832,7 @@
                 </a:solidFill>
                 <a:latin typeface="맑은 고딕"/>
               </a:rPr>
-              <a:t>증상 되묻기</a:t>
+              <a:t>증상 되묻기 [핵심]</a:t>
             </a:r>
           </a:p>
         </p:txBody>
@@ -7745,7 +7761,7 @@
                 </a:solidFill>
                 <a:latin typeface="맑은 고딕"/>
               </a:rPr>
-              <a:t>진료과 안내 · 지역 묻기</a:t>
+              <a:t>진료과 안내 · 지역 묻기 [핵심]</a:t>
             </a:r>
           </a:p>
         </p:txBody>
@@ -8674,7 +8690,7 @@
                 </a:solidFill>
                 <a:latin typeface="맑은 고딕"/>
               </a:rPr>
-              <a:t>응급실 실시간 병상</a:t>
+              <a:t>응급실 실시간 병상 [부기능]</a:t>
             </a:r>
           </a:p>
         </p:txBody>
@@ -9879,7 +9895,7 @@
                 </a:solidFill>
                 <a:latin typeface="맑은 고딕"/>
               </a:rPr>
-              <a:t>지금 문 연 약국</a:t>
+              <a:t>지금 문 연 약국 [부기능]</a:t>
             </a:r>
           </a:p>
         </p:txBody>
@@ -11015,7 +11031,7 @@
                 </a:solidFill>
                 <a:latin typeface="맑은 고딕"/>
               </a:rPr>
-              <a:t>로그인</a:t>
+              <a:t>로그인 [후순위]</a:t>
             </a:r>
           </a:p>
         </p:txBody>
@@ -12066,7 +12082,7 @@
                 </a:solidFill>
                 <a:latin typeface="맑은 고딕"/>
               </a:rPr>
-              <a:t>회원가입</a:t>
+              <a:t>회원가입 [후순위]</a:t>
             </a:r>
           </a:p>
         </p:txBody>
@@ -13006,7 +13022,7 @@
         </p:nvGraphicFramePr>
         <p:xfrm>
           <a:off x="502920" y="1417320"/>
-          <a:ext cx="8321040" cy="1755648"/>
+          <a:ext cx="8321040" cy="2103120"/>
         </p:xfrm>
         <a:graphic>
           <a:graphicData uri="http://schemas.openxmlformats.org/drawingml/2006/table">
@@ -13570,6 +13586,114 @@
                   </a:tcPr>
                 </a:tc>
               </a:tr>
+              <a:tr h="347472">
+                <a:tc>
+                  <a:txBody>
+                    <a:bodyPr/>
+                    <a:lstStyle/>
+                    <a:p>
+                      <a:pPr algn="ctr"/>
+                      <a:r>
+                        <a:rPr sz="1100" b="0">
+                          <a:solidFill>
+                            <a:srgbClr val="111111"/>
+                          </a:solidFill>
+                          <a:latin typeface="맑은 고딕"/>
+                        </a:rPr>
+                        <a:t>0.5</a:t>
+                      </a:r>
+                    </a:p>
+                  </a:txBody>
+                  <a:tcPr anchor="ctr" marL="54864" marR="54864">
+                    <a:solidFill>
+                      <a:srgbClr val="FFFFFF"/>
+                    </a:solidFill>
+                  </a:tcPr>
+                </a:tc>
+                <a:tc>
+                  <a:txBody>
+                    <a:bodyPr/>
+                    <a:lstStyle/>
+                    <a:p>
+                      <a:pPr algn="ctr"/>
+                      <a:r>
+                        <a:rPr sz="1100" b="0">
+                          <a:solidFill>
+                            <a:srgbClr val="111111"/>
+                          </a:solidFill>
+                          <a:latin typeface="맑은 고딕"/>
+                        </a:rPr>
+                        <a:t>2026.09.29</a:t>
+                      </a:r>
+                    </a:p>
+                  </a:txBody>
+                  <a:tcPr anchor="ctr" marL="54864" marR="54864">
+                    <a:solidFill>
+                      <a:srgbClr val="FFFFFF"/>
+                    </a:solidFill>
+                  </a:tcPr>
+                </a:tc>
+                <a:tc>
+                  <a:txBody>
+                    <a:bodyPr/>
+                    <a:lstStyle/>
+                    <a:p>
+                      <a:pPr algn="l"/>
+                      <a:r>
+                        <a:rPr sz="1100" b="0">
+                          <a:solidFill>
+                            <a:srgbClr val="111111"/>
+                          </a:solidFill>
+                          <a:latin typeface="맑은 고딕"/>
+                        </a:rPr>
+                        <a:t>- 핵심기능·부기능·후순위 구분 표시 (3차 멘토링 의견)</a:t>
+                      </a:r>
+                    </a:p>
+                  </a:txBody>
+                  <a:tcPr anchor="ctr" marL="54864" marR="54864">
+                    <a:solidFill>
+                      <a:srgbClr val="FFFFFF"/>
+                    </a:solidFill>
+                  </a:tcPr>
+                </a:tc>
+                <a:tc>
+                  <a:txBody>
+                    <a:bodyPr/>
+                    <a:lstStyle/>
+                    <a:p>
+                      <a:pPr algn="ctr"/>
+                      <a:r>
+                        <a:rPr sz="1100" b="0">
+                          <a:solidFill>
+                            <a:srgbClr val="111111"/>
+                          </a:solidFill>
+                          <a:latin typeface="맑은 고딕"/>
+                        </a:rPr>
+                        <a:t>이영훈</a:t>
+                      </a:r>
+                    </a:p>
+                  </a:txBody>
+                  <a:tcPr anchor="ctr" marL="54864" marR="54864">
+                    <a:solidFill>
+                      <a:srgbClr val="FFFFFF"/>
+                    </a:solidFill>
+                  </a:tcPr>
+                </a:tc>
+                <a:tc>
+                  <a:txBody>
+                    <a:bodyPr/>
+                    <a:lstStyle/>
+                    <a:p>
+                      <a:pPr algn="ctr"/>
+                    </a:p>
+                  </a:txBody>
+                  <a:tcPr anchor="ctr" marL="54864" marR="54864">
+                    <a:solidFill>
+                      <a:srgbClr val="FFFFFF"/>
+                    </a:solidFill>
+                  </a:tcPr>
+                </a:tc>
+              </a:tr>
             </a:tbl>
           </a:graphicData>
         </a:graphic>
@@ -14931,7 +15055,7 @@
                 </a:solidFill>
                 <a:latin typeface="맑은 고딕"/>
               </a:rPr>
-              <a:t>예약 안내</a:t>
+              <a:t>길찾기</a:t>
             </a:r>
           </a:p>
         </p:txBody>
@@ -14987,7 +15111,7 @@
                 </a:solidFill>
                 <a:latin typeface="맑은 고딕"/>
               </a:rPr>
-              <a:t>길찾기</a:t>
+              <a:t>예약 안내 (후순위)</a:t>
             </a:r>
           </a:p>
         </p:txBody>
@@ -15343,7 +15467,7 @@
                 </a:solidFill>
                 <a:latin typeface="맑은 고딕"/>
               </a:rPr>
-              <a:t>응급실</a:t>
+              <a:t>응급실 (부기능)</a:t>
             </a:r>
           </a:p>
         </p:txBody>
@@ -15521,7 +15645,7 @@
                 </a:solidFill>
                 <a:latin typeface="맑은 고딕"/>
               </a:rPr>
-              <a:t>약국</a:t>
+              <a:t>약국 (부기능)</a:t>
             </a:r>
           </a:p>
         </p:txBody>
@@ -15699,7 +15823,7 @@
                 </a:solidFill>
                 <a:latin typeface="맑은 고딕"/>
               </a:rPr>
-              <a:t>회원</a:t>
+              <a:t>회원 (후순위)</a:t>
             </a:r>
           </a:p>
         </p:txBody>
@@ -15982,8 +16106,8 @@
         </p:nvSpPr>
         <p:spPr>
           <a:xfrm>
-            <a:off x="502920" y="6355080"/>
-            <a:ext cx="8961120" cy="320040"/>
+            <a:off x="502920" y="6172200"/>
+            <a:ext cx="8961120" cy="548640"/>
           </a:xfrm>
           <a:prstGeom prst="rect">
             <a:avLst/>
@@ -15995,6 +16119,22 @@
             <a:spAutoFit/>
           </a:bodyPr>
           <a:lstStyle/>
+          <a:p>
+            <a:pPr algn="l">
+              <a:lnSpc>
+                <a:spcPct val="110000"/>
+              </a:lnSpc>
+            </a:pPr>
+            <a:r>
+              <a:rPr sz="900" b="0">
+                <a:solidFill>
+                  <a:srgbClr val="595959"/>
+                </a:solidFill>
+                <a:latin typeface="맑은 고딕"/>
+              </a:rPr>
+              <a:t>※ 핵심기능 : 조건 추출 · 증상→진료과 · 공공데이터 검색 · 이유 있는 추천 · 음성 입력 · 길찾기 (3차 멘토링 의견 반영)</a:t>
+            </a:r>
+          </a:p>
           <a:p>
             <a:pPr algn="l">
               <a:lnSpc>
@@ -21364,7 +21504,7 @@
                 </a:solidFill>
                 <a:latin typeface="맑은 고딕"/>
               </a:rPr>
-              <a:t>AI 병원 안내 (첫 화면)</a:t>
+              <a:t>AI 병원 안내 (첫 화면) [핵심]</a:t>
             </a:r>
           </a:p>
         </p:txBody>
@@ -22537,7 +22677,7 @@
                 </a:solidFill>
                 <a:latin typeface="맑은 고딕"/>
               </a:rPr>
-              <a:t>음성 입력 중</a:t>
+              <a:t>음성 입력 중 [핵심]</a:t>
             </a:r>
           </a:p>
         </p:txBody>
